--- a/docs/pptx/whole/ritu-egfr-discordance-hist.pptx
+++ b/docs/pptx/whole/ritu-egfr-discordance-hist.pptx
@@ -2271,7 +2271,7 @@
           </p:nvSpPr>
           <p:spPr>
             <a:xfrm>
-              <a:off x="994649" y="4841471"/>
+              <a:off x="994649" y="4843349"/>
               <a:ext cx="7603582" cy="0"/>
             </a:xfrm>
             <a:custGeom>
@@ -2314,7 +2314,7 @@
           </p:nvSpPr>
           <p:spPr>
             <a:xfrm>
-              <a:off x="994649" y="3628312"/>
+              <a:off x="994649" y="3633946"/>
               <a:ext cx="7603582" cy="0"/>
             </a:xfrm>
             <a:custGeom>
@@ -2357,7 +2357,7 @@
           </p:nvSpPr>
           <p:spPr>
             <a:xfrm>
-              <a:off x="994649" y="2415152"/>
+              <a:off x="994649" y="2424542"/>
               <a:ext cx="7603582" cy="0"/>
             </a:xfrm>
             <a:custGeom>
@@ -2572,7 +2572,7 @@
           </p:nvSpPr>
           <p:spPr>
             <a:xfrm>
-              <a:off x="994649" y="4234891"/>
+              <a:off x="994649" y="4238647"/>
               <a:ext cx="7603582" cy="0"/>
             </a:xfrm>
             <a:custGeom>
@@ -2615,7 +2615,7 @@
           </p:nvSpPr>
           <p:spPr>
             <a:xfrm>
-              <a:off x="994649" y="3021732"/>
+              <a:off x="994649" y="3029244"/>
               <a:ext cx="7603582" cy="0"/>
             </a:xfrm>
             <a:custGeom>
@@ -3199,8 +3199,8 @@
           </p:nvSpPr>
           <p:spPr>
             <a:xfrm>
-              <a:off x="5084455" y="4321277"/>
-              <a:ext cx="288014" cy="1126773"/>
+              <a:off x="5084455" y="4396395"/>
+              <a:ext cx="288014" cy="1051655"/>
             </a:xfrm>
             <a:prstGeom prst="rect">
               <a:avLst/>
@@ -4513,7 +4513,7 @@
           </p:nvSpPr>
           <p:spPr>
             <a:xfrm>
-              <a:off x="835933" y="4183914"/>
+              <a:off x="835933" y="4187669"/>
               <a:ext cx="79004" cy="101955"/>
             </a:xfrm>
             <a:prstGeom prst="rect">
@@ -4559,7 +4559,7 @@
           </p:nvSpPr>
           <p:spPr>
             <a:xfrm>
-              <a:off x="756929" y="2970754"/>
+              <a:off x="756929" y="2978266"/>
               <a:ext cx="158008" cy="101955"/>
             </a:xfrm>
             <a:prstGeom prst="rect">
